--- a/ppt/IoTAI06-KNN.pptx
+++ b/ppt/IoTAI06-KNN.pptx
@@ -4771,14 +4771,14 @@
           <a:p>
             <a:r>
               <a:rPr lang="fr-FR" dirty="0"/>
-              <a:t>pour mesurer des distances euclidiennes il faut comparer ce qui est comparable</a:t>
+              <a:t>Pour mesurer des distances euclidiennes il faut comparer ce qui est comparable</a:t>
             </a:r>
           </a:p>
           <a:p>
             <a:pPr lvl="1"/>
             <a:r>
               <a:rPr lang="fr-FR" dirty="0"/>
-              <a:t>Tout doit être sur le même facture d'échelle</a:t>
+              <a:t>Tout doit être sur le même facteur d'échelle</a:t>
             </a:r>
           </a:p>
           <a:p>
@@ -4814,15 +4814,7 @@
           <a:p>
             <a:r>
               <a:rPr lang="en-US" dirty="0"/>
-              <a:t>Le scaler fait </a:t>
-            </a:r>
-            <a:r>
-              <a:rPr lang="en-US" dirty="0" err="1"/>
-              <a:t>partie</a:t>
-            </a:r>
-            <a:r>
-              <a:rPr lang="en-US" dirty="0"/>
-              <a:t> du </a:t>
+              <a:t>Le scaler fait parti du </a:t>
             </a:r>
             <a:r>
               <a:rPr lang="en-US" dirty="0" err="1"/>
@@ -4850,7 +4842,23 @@
             </a:r>
             <a:r>
               <a:rPr lang="en-US" dirty="0"/>
-              <a:t> avec un scaler, la prediction doit utilizer des données </a:t>
+              <a:t> avec un scaler, la </a:t>
+            </a:r>
+            <a:r>
+              <a:rPr lang="en-US" dirty="0" err="1"/>
+              <a:t>prédiction</a:t>
+            </a:r>
+            <a:r>
+              <a:rPr lang="en-US" dirty="0"/>
+              <a:t> doit </a:t>
+            </a:r>
+            <a:r>
+              <a:rPr lang="en-US"/>
+              <a:t>utiliser</a:t>
+            </a:r>
+            <a:r>
+              <a:rPr lang="en-US" dirty="0"/>
+              <a:t> des données </a:t>
             </a:r>
             <a:r>
               <a:rPr lang="en-US" dirty="0" err="1"/>
@@ -4962,7 +4970,7 @@
             </a:r>
             <a:r>
               <a:rPr lang="fr-FR" dirty="0"/>
-              <a:t> calculer le min et le max et normaliser sur [0..1]</a:t>
+              <a:t> calcule le min et le max et normaliser sur [0..1]</a:t>
             </a:r>
           </a:p>
           <a:p>
@@ -4993,7 +5001,7 @@
             </a:r>
             <a:r>
               <a:rPr lang="fr-FR" dirty="0" err="1"/>
-              <a:t>outfits</a:t>
+              <a:t>outliers</a:t>
             </a:r>
             <a:endParaRPr lang="fr-FR" dirty="0"/>
           </a:p>
